--- a/public/fun/pack/pptx/review/보장점검양식_40_사업장점검_붕어빵포장마차.pptx
+++ b/public/fun/pack/pptx/review/보장점검양식_40_사업장점검_붕어빵포장마차.pptx
@@ -3286,14 +3286,6 @@
 <file path=ppt/slides/slide1.xml><?xml version="1.0" encoding="utf-8"?>
 <p:sld xmlns:a="http://schemas.openxmlformats.org/drawingml/2006/main" xmlns:p="http://schemas.openxmlformats.org/presentationml/2006/main" xmlns:r="http://schemas.openxmlformats.org/officeDocument/2006/relationships">
   <p:cSld>
-    <p:bg>
-      <p:bgPr>
-        <a:solidFill>
-          <a:srgbClr val="FFFFFF"/>
-        </a:solidFill>
-        <a:effectLst/>
-      </p:bgPr>
-    </p:bg>
     <p:spTree>
       <p:nvGrpSpPr>
         <p:cNvPr id="1" name=""/>
@@ -3301,383 +3293,30 @@
         <p:nvPr/>
       </p:nvGrpSpPr>
       <p:grpSpPr/>
-      <p:sp>
-        <p:nvSpPr>
-          <p:cNvPr id="3" name="장식"/>
-          <p:cNvSpPr/>
+      <p:pic>
+        <p:nvPicPr>
+          <p:cNvPr id="3" name="표지 그림" descr="review-40.jpg"/>
+          <p:cNvPicPr>
+            <a:picLocks noChangeAspect="1"/>
+          </p:cNvPicPr>
           <p:nvPr/>
-        </p:nvSpPr>
-        <p:spPr>
-          <a:xfrm>
-            <a:off x="0" y="2057400"/>
-            <a:ext cx="10241023" cy="1828800"/>
-          </a:xfrm>
-          <a:prstGeom prst="homePlate">
-            <a:avLst/>
-          </a:prstGeom>
-          <a:solidFill>
-            <a:srgbClr val="AE7429"/>
-          </a:solidFill>
-          <a:ln>
-            <a:noFill/>
-          </a:ln>
-        </p:spPr>
-        <p:txBody>
-          <a:bodyPr rtlCol="0" anchor="ctr"/>
-          <a:lstStyle/>
-          <a:p>
-            <a:pPr algn="ctr"/>
-          </a:p>
-        </p:txBody>
-      </p:sp>
-      <p:sp>
-        <p:nvSpPr>
-          <p:cNvPr id="4" name="장식"/>
-          <p:cNvSpPr/>
-          <p:nvPr/>
-        </p:nvSpPr>
-        <p:spPr>
-          <a:xfrm>
-            <a:off x="0" y="3886200"/>
-            <a:ext cx="9509522" cy="64008"/>
+        </p:nvPicPr>
+        <p:blipFill>
+          <a:blip r:embed="rId2"/>
+          <a:stretch>
+            <a:fillRect/>
+          </a:stretch>
+        </p:blipFill>
+        <p:spPr>
+          <a:xfrm>
+            <a:off x="0" y="0"/>
+            <a:ext cx="12191695" cy="6858000"/>
           </a:xfrm>
           <a:prstGeom prst="rect">
             <a:avLst/>
           </a:prstGeom>
-          <a:solidFill>
-            <a:srgbClr val="3B8B91"/>
-          </a:solidFill>
-          <a:ln>
-            <a:noFill/>
-          </a:ln>
-        </p:spPr>
-        <p:txBody>
-          <a:bodyPr rtlCol="0" anchor="ctr"/>
-          <a:lstStyle/>
-          <a:p>
-            <a:pPr algn="ctr"/>
-          </a:p>
-        </p:txBody>
-      </p:sp>
-      <p:sp>
-        <p:nvSpPr>
-          <p:cNvPr id="5" name="장식"/>
-          <p:cNvSpPr/>
-          <p:nvPr/>
-        </p:nvSpPr>
-        <p:spPr>
-          <a:xfrm>
-            <a:off x="9263744" y="704815"/>
-            <a:ext cx="452864" cy="452864"/>
-          </a:xfrm>
-          <a:prstGeom prst="ellipse">
-            <a:avLst/>
-          </a:prstGeom>
-          <a:solidFill>
-            <a:srgbClr val="AE7429"/>
-          </a:solidFill>
-          <a:ln>
-            <a:noFill/>
-          </a:ln>
-        </p:spPr>
-        <p:txBody>
-          <a:bodyPr rtlCol="0" anchor="ctr"/>
-          <a:lstStyle/>
-          <a:p>
-            <a:pPr algn="ctr"/>
-          </a:p>
-        </p:txBody>
-      </p:sp>
-      <p:sp>
-        <p:nvSpPr>
-          <p:cNvPr id="6" name="장식"/>
-          <p:cNvSpPr/>
-          <p:nvPr/>
-        </p:nvSpPr>
-        <p:spPr>
-          <a:xfrm>
-            <a:off x="10595107" y="856829"/>
-            <a:ext cx="275764" cy="275764"/>
-          </a:xfrm>
-          <a:prstGeom prst="ellipse">
-            <a:avLst/>
-          </a:prstGeom>
-          <a:solidFill>
-            <a:srgbClr val="F5E3CC"/>
-          </a:solidFill>
-          <a:ln>
-            <a:noFill/>
-          </a:ln>
-        </p:spPr>
-        <p:txBody>
-          <a:bodyPr rtlCol="0" anchor="ctr"/>
-          <a:lstStyle/>
-          <a:p>
-            <a:pPr algn="ctr"/>
-          </a:p>
-        </p:txBody>
-      </p:sp>
-      <p:sp>
-        <p:nvSpPr>
-          <p:cNvPr id="7" name="장식"/>
-          <p:cNvSpPr/>
-          <p:nvPr/>
-        </p:nvSpPr>
-        <p:spPr>
-          <a:xfrm>
-            <a:off x="11246098" y="2492187"/>
-            <a:ext cx="292227" cy="292227"/>
-          </a:xfrm>
-          <a:prstGeom prst="ellipse">
-            <a:avLst/>
-          </a:prstGeom>
-          <a:solidFill>
-            <a:srgbClr val="3B8B91"/>
-          </a:solidFill>
-          <a:ln>
-            <a:noFill/>
-          </a:ln>
-        </p:spPr>
-        <p:txBody>
-          <a:bodyPr rtlCol="0" anchor="ctr"/>
-          <a:lstStyle/>
-          <a:p>
-            <a:pPr algn="ctr"/>
-          </a:p>
-        </p:txBody>
-      </p:sp>
-      <p:sp>
-        <p:nvSpPr>
-          <p:cNvPr id="8" name="장식"/>
-          <p:cNvSpPr/>
-          <p:nvPr/>
-        </p:nvSpPr>
-        <p:spPr>
-          <a:xfrm>
-            <a:off x="10856002" y="963247"/>
-            <a:ext cx="216899" cy="216899"/>
-          </a:xfrm>
-          <a:prstGeom prst="ellipse">
-            <a:avLst/>
-          </a:prstGeom>
-          <a:solidFill>
-            <a:srgbClr val="AE7429"/>
-          </a:solidFill>
-          <a:ln>
-            <a:noFill/>
-          </a:ln>
-        </p:spPr>
-        <p:txBody>
-          <a:bodyPr rtlCol="0" anchor="ctr"/>
-          <a:lstStyle/>
-          <a:p>
-            <a:pPr algn="ctr"/>
-          </a:p>
-        </p:txBody>
-      </p:sp>
-      <p:sp>
-        <p:nvSpPr>
-          <p:cNvPr id="9" name="장식"/>
-          <p:cNvSpPr/>
-          <p:nvPr/>
-        </p:nvSpPr>
-        <p:spPr>
-          <a:xfrm>
-            <a:off x="9592789" y="299863"/>
-            <a:ext cx="236902" cy="236902"/>
-          </a:xfrm>
-          <a:prstGeom prst="ellipse">
-            <a:avLst/>
-          </a:prstGeom>
-          <a:solidFill>
-            <a:srgbClr val="F5E3CC"/>
-          </a:solidFill>
-          <a:ln>
-            <a:noFill/>
-          </a:ln>
-        </p:spPr>
-        <p:txBody>
-          <a:bodyPr rtlCol="0" anchor="ctr"/>
-          <a:lstStyle/>
-          <a:p>
-            <a:pPr algn="ctr"/>
-          </a:p>
-        </p:txBody>
-      </p:sp>
-      <p:sp>
-        <p:nvSpPr>
-          <p:cNvPr id="10" name="장식"/>
-          <p:cNvSpPr/>
-          <p:nvPr/>
-        </p:nvSpPr>
-        <p:spPr>
-          <a:xfrm>
-            <a:off x="11671528" y="2282743"/>
-            <a:ext cx="391317" cy="391317"/>
-          </a:xfrm>
-          <a:prstGeom prst="ellipse">
-            <a:avLst/>
-          </a:prstGeom>
-          <a:solidFill>
-            <a:srgbClr val="3B8B91"/>
-          </a:solidFill>
-          <a:ln>
-            <a:noFill/>
-          </a:ln>
-        </p:spPr>
-        <p:txBody>
-          <a:bodyPr rtlCol="0" anchor="ctr"/>
-          <a:lstStyle/>
-          <a:p>
-            <a:pPr algn="ctr"/>
-          </a:p>
-        </p:txBody>
-      </p:sp>
-      <p:sp>
-        <p:nvSpPr>
-          <p:cNvPr id="11" name="장식"/>
-          <p:cNvSpPr/>
-          <p:nvPr/>
-        </p:nvSpPr>
-        <p:spPr>
-          <a:xfrm>
-            <a:off x="10999413" y="442115"/>
-            <a:ext cx="455801" cy="455801"/>
-          </a:xfrm>
-          <a:prstGeom prst="ellipse">
-            <a:avLst/>
-          </a:prstGeom>
-          <a:solidFill>
-            <a:srgbClr val="AE7429"/>
-          </a:solidFill>
-          <a:ln>
-            <a:noFill/>
-          </a:ln>
-        </p:spPr>
-        <p:txBody>
-          <a:bodyPr rtlCol="0" anchor="ctr"/>
-          <a:lstStyle/>
-          <a:p>
-            <a:pPr algn="ctr"/>
-          </a:p>
-        </p:txBody>
-      </p:sp>
-      <p:sp>
-        <p:nvSpPr>
-          <p:cNvPr id="12" name="장식"/>
-          <p:cNvSpPr/>
-          <p:nvPr/>
-        </p:nvSpPr>
-        <p:spPr>
-          <a:xfrm>
-            <a:off x="10212933" y="489281"/>
-            <a:ext cx="358123" cy="358123"/>
-          </a:xfrm>
-          <a:prstGeom prst="ellipse">
-            <a:avLst/>
-          </a:prstGeom>
-          <a:solidFill>
-            <a:srgbClr val="F5E3CC"/>
-          </a:solidFill>
-          <a:ln>
-            <a:noFill/>
-          </a:ln>
-        </p:spPr>
-        <p:txBody>
-          <a:bodyPr rtlCol="0" anchor="ctr"/>
-          <a:lstStyle/>
-          <a:p>
-            <a:pPr algn="ctr"/>
-          </a:p>
-        </p:txBody>
-      </p:sp>
-      <p:sp>
-        <p:nvSpPr>
-          <p:cNvPr id="13" name="장식"/>
-          <p:cNvSpPr/>
-          <p:nvPr/>
-        </p:nvSpPr>
-        <p:spPr>
-          <a:xfrm>
-            <a:off x="11865382" y="1333302"/>
-            <a:ext cx="269303" cy="269303"/>
-          </a:xfrm>
-          <a:prstGeom prst="ellipse">
-            <a:avLst/>
-          </a:prstGeom>
-          <a:solidFill>
-            <a:srgbClr val="3B8B91"/>
-          </a:solidFill>
-          <a:ln>
-            <a:noFill/>
-          </a:ln>
-        </p:spPr>
-        <p:txBody>
-          <a:bodyPr rtlCol="0" anchor="ctr"/>
-          <a:lstStyle/>
-          <a:p>
-            <a:pPr algn="ctr"/>
-          </a:p>
-        </p:txBody>
-      </p:sp>
-      <p:sp>
-        <p:nvSpPr>
-          <p:cNvPr id="14" name="장식"/>
-          <p:cNvSpPr/>
-          <p:nvPr/>
-        </p:nvSpPr>
-        <p:spPr>
-          <a:xfrm>
-            <a:off x="11308724" y="1757165"/>
-            <a:ext cx="317138" cy="317138"/>
-          </a:xfrm>
-          <a:prstGeom prst="ellipse">
-            <a:avLst/>
-          </a:prstGeom>
-          <a:solidFill>
-            <a:srgbClr val="AE7429"/>
-          </a:solidFill>
-          <a:ln>
-            <a:noFill/>
-          </a:ln>
-        </p:spPr>
-        <p:txBody>
-          <a:bodyPr rtlCol="0" anchor="ctr"/>
-          <a:lstStyle/>
-          <a:p>
-            <a:pPr algn="ctr"/>
-          </a:p>
-        </p:txBody>
-      </p:sp>
-      <p:sp>
-        <p:nvSpPr>
-          <p:cNvPr id="15" name="장식"/>
-          <p:cNvSpPr/>
-          <p:nvPr/>
-        </p:nvSpPr>
-        <p:spPr>
-          <a:xfrm>
-            <a:off x="9664609" y="74145"/>
-            <a:ext cx="370756" cy="370756"/>
-          </a:xfrm>
-          <a:prstGeom prst="ellipse">
-            <a:avLst/>
-          </a:prstGeom>
-          <a:solidFill>
-            <a:srgbClr val="F5E3CC"/>
-          </a:solidFill>
-          <a:ln>
-            <a:noFill/>
-          </a:ln>
-        </p:spPr>
-        <p:txBody>
-          <a:bodyPr rtlCol="0" anchor="ctr"/>
-          <a:lstStyle/>
-          <a:p>
-            <a:pPr algn="ctr"/>
-          </a:p>
-        </p:txBody>
-      </p:sp>
+        </p:spPr>
+      </p:pic>
       <p:sp>
         <p:nvSpPr>
           <p:cNvPr id="2" name="Title 1"/>
@@ -3690,8 +3329,8 @@
         </p:nvSpPr>
         <p:spPr>
           <a:xfrm>
-            <a:off x="731501" y="2167128"/>
-            <a:ext cx="8778020" cy="1609344"/>
+            <a:off x="853418" y="2057400"/>
+            <a:ext cx="6095847" cy="1554480"/>
           </a:xfrm>
         </p:spPr>
         <p:txBody>
@@ -3708,7 +3347,7 @@
             <a:r>
               <a:rPr sz="3600" b="1" i="0">
                 <a:solidFill>
-                  <a:srgbClr val="FFFFFF"/>
+                  <a:srgbClr val="5B3D15"/>
                 </a:solidFill>
               </a:rPr>
               <a:t>우리 보험 점검 시간</a:t>
@@ -3718,14 +3357,14 @@
       </p:sp>
       <p:sp>
         <p:nvSpPr>
-          <p:cNvPr id="16" name="한 줄 문구"/>
+          <p:cNvPr id="4" name="한 줄 문구"/>
           <p:cNvSpPr txBox="1"/>
           <p:nvPr/>
         </p:nvSpPr>
         <p:spPr>
           <a:xfrm>
-            <a:off x="731501" y="4160520"/>
-            <a:ext cx="8534186" cy="822960"/>
+            <a:off x="853418" y="3749039"/>
+            <a:ext cx="6095847" cy="822960"/>
           </a:xfrm>
           <a:prstGeom prst="rect">
             <a:avLst/>
@@ -3749,21 +3388,21 @@
                   <a:srgbClr val="5B3D15"/>
                 </a:solidFill>
               </a:rPr>
-              <a:t>붕어빵 사 들고 가는 길에 떠올려 본 가족</a:t>
+              <a:t>결산 전에 한 번 확인합니다</a:t>
             </a:r>
           </a:p>
         </p:txBody>
       </p:sp>
       <p:sp>
         <p:nvSpPr>
-          <p:cNvPr id="17" name="안내 문구"/>
+          <p:cNvPr id="5" name="안내 문구"/>
           <p:cNvSpPr txBox="1"/>
           <p:nvPr/>
         </p:nvSpPr>
         <p:spPr>
           <a:xfrm>
-            <a:off x="731501" y="5029200"/>
-            <a:ext cx="8534186" cy="914400"/>
+            <a:off x="853418" y="4617720"/>
+            <a:ext cx="6095847" cy="914400"/>
           </a:xfrm>
           <a:prstGeom prst="rect">
             <a:avLst/>
@@ -3787,7 +3426,7 @@
                   <a:srgbClr val="666666"/>
                 </a:solidFill>
               </a:rPr>
-              <a:t>사업장 점검 · 2026. 00. 00</a:t>
+              <a:t>사업장 점검 · 2027. 00. 00</a:t>
             </a:r>
           </a:p>
           <a:p>
@@ -3864,325 +3503,6 @@
       </p:sp>
       <p:sp>
         <p:nvSpPr>
-          <p:cNvPr id="4" name="장식"/>
-          <p:cNvSpPr/>
-          <p:nvPr/>
-        </p:nvSpPr>
-        <p:spPr>
-          <a:xfrm>
-            <a:off x="10691076" y="489607"/>
-            <a:ext cx="195353" cy="195353"/>
-          </a:xfrm>
-          <a:prstGeom prst="ellipse">
-            <a:avLst/>
-          </a:prstGeom>
-          <a:solidFill>
-            <a:srgbClr val="AE7429"/>
-          </a:solidFill>
-          <a:ln>
-            <a:noFill/>
-          </a:ln>
-        </p:spPr>
-        <p:txBody>
-          <a:bodyPr rtlCol="0" anchor="ctr"/>
-          <a:lstStyle/>
-          <a:p>
-            <a:pPr algn="ctr"/>
-          </a:p>
-        </p:txBody>
-      </p:sp>
-      <p:sp>
-        <p:nvSpPr>
-          <p:cNvPr id="5" name="장식"/>
-          <p:cNvSpPr/>
-          <p:nvPr/>
-        </p:nvSpPr>
-        <p:spPr>
-          <a:xfrm>
-            <a:off x="11265390" y="555182"/>
-            <a:ext cx="118957" cy="118957"/>
-          </a:xfrm>
-          <a:prstGeom prst="ellipse">
-            <a:avLst/>
-          </a:prstGeom>
-          <a:solidFill>
-            <a:srgbClr val="F5E3CC"/>
-          </a:solidFill>
-          <a:ln>
-            <a:noFill/>
-          </a:ln>
-        </p:spPr>
-        <p:txBody>
-          <a:bodyPr rtlCol="0" anchor="ctr"/>
-          <a:lstStyle/>
-          <a:p>
-            <a:pPr algn="ctr"/>
-          </a:p>
-        </p:txBody>
-      </p:sp>
-      <p:sp>
-        <p:nvSpPr>
-          <p:cNvPr id="6" name="장식"/>
-          <p:cNvSpPr/>
-          <p:nvPr/>
-        </p:nvSpPr>
-        <p:spPr>
-          <a:xfrm>
-            <a:off x="11546210" y="1260630"/>
-            <a:ext cx="126058" cy="126058"/>
-          </a:xfrm>
-          <a:prstGeom prst="ellipse">
-            <a:avLst/>
-          </a:prstGeom>
-          <a:solidFill>
-            <a:srgbClr val="3B8B91"/>
-          </a:solidFill>
-          <a:ln>
-            <a:noFill/>
-          </a:ln>
-        </p:spPr>
-        <p:txBody>
-          <a:bodyPr rtlCol="0" anchor="ctr"/>
-          <a:lstStyle/>
-          <a:p>
-            <a:pPr algn="ctr"/>
-          </a:p>
-        </p:txBody>
-      </p:sp>
-      <p:sp>
-        <p:nvSpPr>
-          <p:cNvPr id="7" name="장식"/>
-          <p:cNvSpPr/>
-          <p:nvPr/>
-        </p:nvSpPr>
-        <p:spPr>
-          <a:xfrm>
-            <a:off x="11377933" y="601087"/>
-            <a:ext cx="93564" cy="93564"/>
-          </a:xfrm>
-          <a:prstGeom prst="ellipse">
-            <a:avLst/>
-          </a:prstGeom>
-          <a:solidFill>
-            <a:srgbClr val="AE7429"/>
-          </a:solidFill>
-          <a:ln>
-            <a:noFill/>
-          </a:ln>
-        </p:spPr>
-        <p:txBody>
-          <a:bodyPr rtlCol="0" anchor="ctr"/>
-          <a:lstStyle/>
-          <a:p>
-            <a:pPr algn="ctr"/>
-          </a:p>
-        </p:txBody>
-      </p:sp>
-      <p:sp>
-        <p:nvSpPr>
-          <p:cNvPr id="8" name="장식"/>
-          <p:cNvSpPr/>
-          <p:nvPr/>
-        </p:nvSpPr>
-        <p:spPr>
-          <a:xfrm>
-            <a:off x="10833017" y="314922"/>
-            <a:ext cx="102193" cy="102193"/>
-          </a:xfrm>
-          <a:prstGeom prst="ellipse">
-            <a:avLst/>
-          </a:prstGeom>
-          <a:solidFill>
-            <a:srgbClr val="F5E3CC"/>
-          </a:solidFill>
-          <a:ln>
-            <a:noFill/>
-          </a:ln>
-        </p:spPr>
-        <p:txBody>
-          <a:bodyPr rtlCol="0" anchor="ctr"/>
-          <a:lstStyle/>
-          <a:p>
-            <a:pPr algn="ctr"/>
-          </a:p>
-        </p:txBody>
-      </p:sp>
-      <p:sp>
-        <p:nvSpPr>
-          <p:cNvPr id="9" name="장식"/>
-          <p:cNvSpPr/>
-          <p:nvPr/>
-        </p:nvSpPr>
-        <p:spPr>
-          <a:xfrm>
-            <a:off x="11729729" y="1170282"/>
-            <a:ext cx="168803" cy="168803"/>
-          </a:xfrm>
-          <a:prstGeom prst="ellipse">
-            <a:avLst/>
-          </a:prstGeom>
-          <a:solidFill>
-            <a:srgbClr val="3B8B91"/>
-          </a:solidFill>
-          <a:ln>
-            <a:noFill/>
-          </a:ln>
-        </p:spPr>
-        <p:txBody>
-          <a:bodyPr rtlCol="0" anchor="ctr"/>
-          <a:lstStyle/>
-          <a:p>
-            <a:pPr algn="ctr"/>
-          </a:p>
-        </p:txBody>
-      </p:sp>
-      <p:sp>
-        <p:nvSpPr>
-          <p:cNvPr id="10" name="장식"/>
-          <p:cNvSpPr/>
-          <p:nvPr/>
-        </p:nvSpPr>
-        <p:spPr>
-          <a:xfrm>
-            <a:off x="11439796" y="376285"/>
-            <a:ext cx="196620" cy="196620"/>
-          </a:xfrm>
-          <a:prstGeom prst="ellipse">
-            <a:avLst/>
-          </a:prstGeom>
-          <a:solidFill>
-            <a:srgbClr val="AE7429"/>
-          </a:solidFill>
-          <a:ln>
-            <a:noFill/>
-          </a:ln>
-        </p:spPr>
-        <p:txBody>
-          <a:bodyPr rtlCol="0" anchor="ctr"/>
-          <a:lstStyle/>
-          <a:p>
-            <a:pPr algn="ctr"/>
-          </a:p>
-        </p:txBody>
-      </p:sp>
-      <p:sp>
-        <p:nvSpPr>
-          <p:cNvPr id="11" name="장식"/>
-          <p:cNvSpPr/>
-          <p:nvPr/>
-        </p:nvSpPr>
-        <p:spPr>
-          <a:xfrm>
-            <a:off x="11100531" y="396632"/>
-            <a:ext cx="154484" cy="154484"/>
-          </a:xfrm>
-          <a:prstGeom prst="ellipse">
-            <a:avLst/>
-          </a:prstGeom>
-          <a:solidFill>
-            <a:srgbClr val="F5E3CC"/>
-          </a:solidFill>
-          <a:ln>
-            <a:noFill/>
-          </a:ln>
-        </p:spPr>
-        <p:txBody>
-          <a:bodyPr rtlCol="0" anchor="ctr"/>
-          <a:lstStyle/>
-          <a:p>
-            <a:pPr algn="ctr"/>
-          </a:p>
-        </p:txBody>
-      </p:sp>
-      <p:sp>
-        <p:nvSpPr>
-          <p:cNvPr id="12" name="장식"/>
-          <p:cNvSpPr/>
-          <p:nvPr/>
-        </p:nvSpPr>
-        <p:spPr>
-          <a:xfrm>
-            <a:off x="11813352" y="760719"/>
-            <a:ext cx="116170" cy="116170"/>
-          </a:xfrm>
-          <a:prstGeom prst="ellipse">
-            <a:avLst/>
-          </a:prstGeom>
-          <a:solidFill>
-            <a:srgbClr val="3B8B91"/>
-          </a:solidFill>
-          <a:ln>
-            <a:noFill/>
-          </a:ln>
-        </p:spPr>
-        <p:txBody>
-          <a:bodyPr rtlCol="0" anchor="ctr"/>
-          <a:lstStyle/>
-          <a:p>
-            <a:pPr algn="ctr"/>
-          </a:p>
-        </p:txBody>
-      </p:sp>
-      <p:sp>
-        <p:nvSpPr>
-          <p:cNvPr id="13" name="장식"/>
-          <p:cNvSpPr/>
-          <p:nvPr/>
-        </p:nvSpPr>
-        <p:spPr>
-          <a:xfrm>
-            <a:off x="11573225" y="943562"/>
-            <a:ext cx="136804" cy="136804"/>
-          </a:xfrm>
-          <a:prstGeom prst="ellipse">
-            <a:avLst/>
-          </a:prstGeom>
-          <a:solidFill>
-            <a:srgbClr val="AE7429"/>
-          </a:solidFill>
-          <a:ln>
-            <a:noFill/>
-          </a:ln>
-        </p:spPr>
-        <p:txBody>
-          <a:bodyPr rtlCol="0" anchor="ctr"/>
-          <a:lstStyle/>
-          <a:p>
-            <a:pPr algn="ctr"/>
-          </a:p>
-        </p:txBody>
-      </p:sp>
-      <p:sp>
-        <p:nvSpPr>
-          <p:cNvPr id="14" name="장식"/>
-          <p:cNvSpPr/>
-          <p:nvPr/>
-        </p:nvSpPr>
-        <p:spPr>
-          <a:xfrm>
-            <a:off x="10863999" y="217553"/>
-            <a:ext cx="159934" cy="159934"/>
-          </a:xfrm>
-          <a:prstGeom prst="ellipse">
-            <a:avLst/>
-          </a:prstGeom>
-          <a:solidFill>
-            <a:srgbClr val="F5E3CC"/>
-          </a:solidFill>
-          <a:ln>
-            <a:noFill/>
-          </a:ln>
-        </p:spPr>
-        <p:txBody>
-          <a:bodyPr rtlCol="0" anchor="ctr"/>
-          <a:lstStyle/>
-          <a:p>
-            <a:pPr algn="ctr"/>
-          </a:p>
-        </p:txBody>
-      </p:sp>
-      <p:sp>
-        <p:nvSpPr>
           <p:cNvPr id="2" name="Title 1"/>
           <p:cNvSpPr>
             <a:spLocks noGrp="1"/>
@@ -4221,7 +3541,7 @@
       </p:sp>
       <p:graphicFrame>
         <p:nvGraphicFramePr>
-          <p:cNvPr id="15" name="표"/>
+          <p:cNvPr id="4" name="표"/>
           <p:cNvGraphicFramePr>
             <a:graphicFrameLocks noGrp="1"/>
           </p:cNvGraphicFramePr>
@@ -4772,325 +4092,6 @@
       </p:sp>
       <p:sp>
         <p:nvSpPr>
-          <p:cNvPr id="4" name="장식"/>
-          <p:cNvSpPr/>
-          <p:nvPr/>
-        </p:nvSpPr>
-        <p:spPr>
-          <a:xfrm>
-            <a:off x="10691076" y="489607"/>
-            <a:ext cx="195353" cy="195353"/>
-          </a:xfrm>
-          <a:prstGeom prst="ellipse">
-            <a:avLst/>
-          </a:prstGeom>
-          <a:solidFill>
-            <a:srgbClr val="AE7429"/>
-          </a:solidFill>
-          <a:ln>
-            <a:noFill/>
-          </a:ln>
-        </p:spPr>
-        <p:txBody>
-          <a:bodyPr rtlCol="0" anchor="ctr"/>
-          <a:lstStyle/>
-          <a:p>
-            <a:pPr algn="ctr"/>
-          </a:p>
-        </p:txBody>
-      </p:sp>
-      <p:sp>
-        <p:nvSpPr>
-          <p:cNvPr id="5" name="장식"/>
-          <p:cNvSpPr/>
-          <p:nvPr/>
-        </p:nvSpPr>
-        <p:spPr>
-          <a:xfrm>
-            <a:off x="11265390" y="555182"/>
-            <a:ext cx="118957" cy="118957"/>
-          </a:xfrm>
-          <a:prstGeom prst="ellipse">
-            <a:avLst/>
-          </a:prstGeom>
-          <a:solidFill>
-            <a:srgbClr val="F5E3CC"/>
-          </a:solidFill>
-          <a:ln>
-            <a:noFill/>
-          </a:ln>
-        </p:spPr>
-        <p:txBody>
-          <a:bodyPr rtlCol="0" anchor="ctr"/>
-          <a:lstStyle/>
-          <a:p>
-            <a:pPr algn="ctr"/>
-          </a:p>
-        </p:txBody>
-      </p:sp>
-      <p:sp>
-        <p:nvSpPr>
-          <p:cNvPr id="6" name="장식"/>
-          <p:cNvSpPr/>
-          <p:nvPr/>
-        </p:nvSpPr>
-        <p:spPr>
-          <a:xfrm>
-            <a:off x="11546210" y="1260630"/>
-            <a:ext cx="126058" cy="126058"/>
-          </a:xfrm>
-          <a:prstGeom prst="ellipse">
-            <a:avLst/>
-          </a:prstGeom>
-          <a:solidFill>
-            <a:srgbClr val="3B8B91"/>
-          </a:solidFill>
-          <a:ln>
-            <a:noFill/>
-          </a:ln>
-        </p:spPr>
-        <p:txBody>
-          <a:bodyPr rtlCol="0" anchor="ctr"/>
-          <a:lstStyle/>
-          <a:p>
-            <a:pPr algn="ctr"/>
-          </a:p>
-        </p:txBody>
-      </p:sp>
-      <p:sp>
-        <p:nvSpPr>
-          <p:cNvPr id="7" name="장식"/>
-          <p:cNvSpPr/>
-          <p:nvPr/>
-        </p:nvSpPr>
-        <p:spPr>
-          <a:xfrm>
-            <a:off x="11377933" y="601087"/>
-            <a:ext cx="93564" cy="93564"/>
-          </a:xfrm>
-          <a:prstGeom prst="ellipse">
-            <a:avLst/>
-          </a:prstGeom>
-          <a:solidFill>
-            <a:srgbClr val="AE7429"/>
-          </a:solidFill>
-          <a:ln>
-            <a:noFill/>
-          </a:ln>
-        </p:spPr>
-        <p:txBody>
-          <a:bodyPr rtlCol="0" anchor="ctr"/>
-          <a:lstStyle/>
-          <a:p>
-            <a:pPr algn="ctr"/>
-          </a:p>
-        </p:txBody>
-      </p:sp>
-      <p:sp>
-        <p:nvSpPr>
-          <p:cNvPr id="8" name="장식"/>
-          <p:cNvSpPr/>
-          <p:nvPr/>
-        </p:nvSpPr>
-        <p:spPr>
-          <a:xfrm>
-            <a:off x="10833017" y="314922"/>
-            <a:ext cx="102193" cy="102193"/>
-          </a:xfrm>
-          <a:prstGeom prst="ellipse">
-            <a:avLst/>
-          </a:prstGeom>
-          <a:solidFill>
-            <a:srgbClr val="F5E3CC"/>
-          </a:solidFill>
-          <a:ln>
-            <a:noFill/>
-          </a:ln>
-        </p:spPr>
-        <p:txBody>
-          <a:bodyPr rtlCol="0" anchor="ctr"/>
-          <a:lstStyle/>
-          <a:p>
-            <a:pPr algn="ctr"/>
-          </a:p>
-        </p:txBody>
-      </p:sp>
-      <p:sp>
-        <p:nvSpPr>
-          <p:cNvPr id="9" name="장식"/>
-          <p:cNvSpPr/>
-          <p:nvPr/>
-        </p:nvSpPr>
-        <p:spPr>
-          <a:xfrm>
-            <a:off x="11729729" y="1170282"/>
-            <a:ext cx="168803" cy="168803"/>
-          </a:xfrm>
-          <a:prstGeom prst="ellipse">
-            <a:avLst/>
-          </a:prstGeom>
-          <a:solidFill>
-            <a:srgbClr val="3B8B91"/>
-          </a:solidFill>
-          <a:ln>
-            <a:noFill/>
-          </a:ln>
-        </p:spPr>
-        <p:txBody>
-          <a:bodyPr rtlCol="0" anchor="ctr"/>
-          <a:lstStyle/>
-          <a:p>
-            <a:pPr algn="ctr"/>
-          </a:p>
-        </p:txBody>
-      </p:sp>
-      <p:sp>
-        <p:nvSpPr>
-          <p:cNvPr id="10" name="장식"/>
-          <p:cNvSpPr/>
-          <p:nvPr/>
-        </p:nvSpPr>
-        <p:spPr>
-          <a:xfrm>
-            <a:off x="11439796" y="376285"/>
-            <a:ext cx="196620" cy="196620"/>
-          </a:xfrm>
-          <a:prstGeom prst="ellipse">
-            <a:avLst/>
-          </a:prstGeom>
-          <a:solidFill>
-            <a:srgbClr val="AE7429"/>
-          </a:solidFill>
-          <a:ln>
-            <a:noFill/>
-          </a:ln>
-        </p:spPr>
-        <p:txBody>
-          <a:bodyPr rtlCol="0" anchor="ctr"/>
-          <a:lstStyle/>
-          <a:p>
-            <a:pPr algn="ctr"/>
-          </a:p>
-        </p:txBody>
-      </p:sp>
-      <p:sp>
-        <p:nvSpPr>
-          <p:cNvPr id="11" name="장식"/>
-          <p:cNvSpPr/>
-          <p:nvPr/>
-        </p:nvSpPr>
-        <p:spPr>
-          <a:xfrm>
-            <a:off x="11100531" y="396632"/>
-            <a:ext cx="154484" cy="154484"/>
-          </a:xfrm>
-          <a:prstGeom prst="ellipse">
-            <a:avLst/>
-          </a:prstGeom>
-          <a:solidFill>
-            <a:srgbClr val="F5E3CC"/>
-          </a:solidFill>
-          <a:ln>
-            <a:noFill/>
-          </a:ln>
-        </p:spPr>
-        <p:txBody>
-          <a:bodyPr rtlCol="0" anchor="ctr"/>
-          <a:lstStyle/>
-          <a:p>
-            <a:pPr algn="ctr"/>
-          </a:p>
-        </p:txBody>
-      </p:sp>
-      <p:sp>
-        <p:nvSpPr>
-          <p:cNvPr id="12" name="장식"/>
-          <p:cNvSpPr/>
-          <p:nvPr/>
-        </p:nvSpPr>
-        <p:spPr>
-          <a:xfrm>
-            <a:off x="11813352" y="760719"/>
-            <a:ext cx="116170" cy="116170"/>
-          </a:xfrm>
-          <a:prstGeom prst="ellipse">
-            <a:avLst/>
-          </a:prstGeom>
-          <a:solidFill>
-            <a:srgbClr val="3B8B91"/>
-          </a:solidFill>
-          <a:ln>
-            <a:noFill/>
-          </a:ln>
-        </p:spPr>
-        <p:txBody>
-          <a:bodyPr rtlCol="0" anchor="ctr"/>
-          <a:lstStyle/>
-          <a:p>
-            <a:pPr algn="ctr"/>
-          </a:p>
-        </p:txBody>
-      </p:sp>
-      <p:sp>
-        <p:nvSpPr>
-          <p:cNvPr id="13" name="장식"/>
-          <p:cNvSpPr/>
-          <p:nvPr/>
-        </p:nvSpPr>
-        <p:spPr>
-          <a:xfrm>
-            <a:off x="11573225" y="943562"/>
-            <a:ext cx="136804" cy="136804"/>
-          </a:xfrm>
-          <a:prstGeom prst="ellipse">
-            <a:avLst/>
-          </a:prstGeom>
-          <a:solidFill>
-            <a:srgbClr val="AE7429"/>
-          </a:solidFill>
-          <a:ln>
-            <a:noFill/>
-          </a:ln>
-        </p:spPr>
-        <p:txBody>
-          <a:bodyPr rtlCol="0" anchor="ctr"/>
-          <a:lstStyle/>
-          <a:p>
-            <a:pPr algn="ctr"/>
-          </a:p>
-        </p:txBody>
-      </p:sp>
-      <p:sp>
-        <p:nvSpPr>
-          <p:cNvPr id="14" name="장식"/>
-          <p:cNvSpPr/>
-          <p:nvPr/>
-        </p:nvSpPr>
-        <p:spPr>
-          <a:xfrm>
-            <a:off x="10863999" y="217553"/>
-            <a:ext cx="159934" cy="159934"/>
-          </a:xfrm>
-          <a:prstGeom prst="ellipse">
-            <a:avLst/>
-          </a:prstGeom>
-          <a:solidFill>
-            <a:srgbClr val="F5E3CC"/>
-          </a:solidFill>
-          <a:ln>
-            <a:noFill/>
-          </a:ln>
-        </p:spPr>
-        <p:txBody>
-          <a:bodyPr rtlCol="0" anchor="ctr"/>
-          <a:lstStyle/>
-          <a:p>
-            <a:pPr algn="ctr"/>
-          </a:p>
-        </p:txBody>
-      </p:sp>
-      <p:sp>
-        <p:nvSpPr>
           <p:cNvPr id="2" name="Title 1"/>
           <p:cNvSpPr>
             <a:spLocks noGrp="1"/>
@@ -5129,7 +4130,7 @@
       </p:sp>
       <p:graphicFrame>
         <p:nvGraphicFramePr>
-          <p:cNvPr id="15" name="표"/>
+          <p:cNvPr id="4" name="표"/>
           <p:cNvGraphicFramePr>
             <a:graphicFrameLocks noGrp="1"/>
           </p:cNvGraphicFramePr>
@@ -6837,325 +5838,6 @@
       </p:sp>
       <p:sp>
         <p:nvSpPr>
-          <p:cNvPr id="4" name="장식"/>
-          <p:cNvSpPr/>
-          <p:nvPr/>
-        </p:nvSpPr>
-        <p:spPr>
-          <a:xfrm>
-            <a:off x="10691076" y="489607"/>
-            <a:ext cx="195353" cy="195353"/>
-          </a:xfrm>
-          <a:prstGeom prst="ellipse">
-            <a:avLst/>
-          </a:prstGeom>
-          <a:solidFill>
-            <a:srgbClr val="AE7429"/>
-          </a:solidFill>
-          <a:ln>
-            <a:noFill/>
-          </a:ln>
-        </p:spPr>
-        <p:txBody>
-          <a:bodyPr rtlCol="0" anchor="ctr"/>
-          <a:lstStyle/>
-          <a:p>
-            <a:pPr algn="ctr"/>
-          </a:p>
-        </p:txBody>
-      </p:sp>
-      <p:sp>
-        <p:nvSpPr>
-          <p:cNvPr id="5" name="장식"/>
-          <p:cNvSpPr/>
-          <p:nvPr/>
-        </p:nvSpPr>
-        <p:spPr>
-          <a:xfrm>
-            <a:off x="11265390" y="555182"/>
-            <a:ext cx="118957" cy="118957"/>
-          </a:xfrm>
-          <a:prstGeom prst="ellipse">
-            <a:avLst/>
-          </a:prstGeom>
-          <a:solidFill>
-            <a:srgbClr val="F5E3CC"/>
-          </a:solidFill>
-          <a:ln>
-            <a:noFill/>
-          </a:ln>
-        </p:spPr>
-        <p:txBody>
-          <a:bodyPr rtlCol="0" anchor="ctr"/>
-          <a:lstStyle/>
-          <a:p>
-            <a:pPr algn="ctr"/>
-          </a:p>
-        </p:txBody>
-      </p:sp>
-      <p:sp>
-        <p:nvSpPr>
-          <p:cNvPr id="6" name="장식"/>
-          <p:cNvSpPr/>
-          <p:nvPr/>
-        </p:nvSpPr>
-        <p:spPr>
-          <a:xfrm>
-            <a:off x="11546210" y="1260630"/>
-            <a:ext cx="126058" cy="126058"/>
-          </a:xfrm>
-          <a:prstGeom prst="ellipse">
-            <a:avLst/>
-          </a:prstGeom>
-          <a:solidFill>
-            <a:srgbClr val="3B8B91"/>
-          </a:solidFill>
-          <a:ln>
-            <a:noFill/>
-          </a:ln>
-        </p:spPr>
-        <p:txBody>
-          <a:bodyPr rtlCol="0" anchor="ctr"/>
-          <a:lstStyle/>
-          <a:p>
-            <a:pPr algn="ctr"/>
-          </a:p>
-        </p:txBody>
-      </p:sp>
-      <p:sp>
-        <p:nvSpPr>
-          <p:cNvPr id="7" name="장식"/>
-          <p:cNvSpPr/>
-          <p:nvPr/>
-        </p:nvSpPr>
-        <p:spPr>
-          <a:xfrm>
-            <a:off x="11377933" y="601087"/>
-            <a:ext cx="93564" cy="93564"/>
-          </a:xfrm>
-          <a:prstGeom prst="ellipse">
-            <a:avLst/>
-          </a:prstGeom>
-          <a:solidFill>
-            <a:srgbClr val="AE7429"/>
-          </a:solidFill>
-          <a:ln>
-            <a:noFill/>
-          </a:ln>
-        </p:spPr>
-        <p:txBody>
-          <a:bodyPr rtlCol="0" anchor="ctr"/>
-          <a:lstStyle/>
-          <a:p>
-            <a:pPr algn="ctr"/>
-          </a:p>
-        </p:txBody>
-      </p:sp>
-      <p:sp>
-        <p:nvSpPr>
-          <p:cNvPr id="8" name="장식"/>
-          <p:cNvSpPr/>
-          <p:nvPr/>
-        </p:nvSpPr>
-        <p:spPr>
-          <a:xfrm>
-            <a:off x="10833017" y="314922"/>
-            <a:ext cx="102193" cy="102193"/>
-          </a:xfrm>
-          <a:prstGeom prst="ellipse">
-            <a:avLst/>
-          </a:prstGeom>
-          <a:solidFill>
-            <a:srgbClr val="F5E3CC"/>
-          </a:solidFill>
-          <a:ln>
-            <a:noFill/>
-          </a:ln>
-        </p:spPr>
-        <p:txBody>
-          <a:bodyPr rtlCol="0" anchor="ctr"/>
-          <a:lstStyle/>
-          <a:p>
-            <a:pPr algn="ctr"/>
-          </a:p>
-        </p:txBody>
-      </p:sp>
-      <p:sp>
-        <p:nvSpPr>
-          <p:cNvPr id="9" name="장식"/>
-          <p:cNvSpPr/>
-          <p:nvPr/>
-        </p:nvSpPr>
-        <p:spPr>
-          <a:xfrm>
-            <a:off x="11729729" y="1170282"/>
-            <a:ext cx="168803" cy="168803"/>
-          </a:xfrm>
-          <a:prstGeom prst="ellipse">
-            <a:avLst/>
-          </a:prstGeom>
-          <a:solidFill>
-            <a:srgbClr val="3B8B91"/>
-          </a:solidFill>
-          <a:ln>
-            <a:noFill/>
-          </a:ln>
-        </p:spPr>
-        <p:txBody>
-          <a:bodyPr rtlCol="0" anchor="ctr"/>
-          <a:lstStyle/>
-          <a:p>
-            <a:pPr algn="ctr"/>
-          </a:p>
-        </p:txBody>
-      </p:sp>
-      <p:sp>
-        <p:nvSpPr>
-          <p:cNvPr id="10" name="장식"/>
-          <p:cNvSpPr/>
-          <p:nvPr/>
-        </p:nvSpPr>
-        <p:spPr>
-          <a:xfrm>
-            <a:off x="11439796" y="376285"/>
-            <a:ext cx="196620" cy="196620"/>
-          </a:xfrm>
-          <a:prstGeom prst="ellipse">
-            <a:avLst/>
-          </a:prstGeom>
-          <a:solidFill>
-            <a:srgbClr val="AE7429"/>
-          </a:solidFill>
-          <a:ln>
-            <a:noFill/>
-          </a:ln>
-        </p:spPr>
-        <p:txBody>
-          <a:bodyPr rtlCol="0" anchor="ctr"/>
-          <a:lstStyle/>
-          <a:p>
-            <a:pPr algn="ctr"/>
-          </a:p>
-        </p:txBody>
-      </p:sp>
-      <p:sp>
-        <p:nvSpPr>
-          <p:cNvPr id="11" name="장식"/>
-          <p:cNvSpPr/>
-          <p:nvPr/>
-        </p:nvSpPr>
-        <p:spPr>
-          <a:xfrm>
-            <a:off x="11100531" y="396632"/>
-            <a:ext cx="154484" cy="154484"/>
-          </a:xfrm>
-          <a:prstGeom prst="ellipse">
-            <a:avLst/>
-          </a:prstGeom>
-          <a:solidFill>
-            <a:srgbClr val="F5E3CC"/>
-          </a:solidFill>
-          <a:ln>
-            <a:noFill/>
-          </a:ln>
-        </p:spPr>
-        <p:txBody>
-          <a:bodyPr rtlCol="0" anchor="ctr"/>
-          <a:lstStyle/>
-          <a:p>
-            <a:pPr algn="ctr"/>
-          </a:p>
-        </p:txBody>
-      </p:sp>
-      <p:sp>
-        <p:nvSpPr>
-          <p:cNvPr id="12" name="장식"/>
-          <p:cNvSpPr/>
-          <p:nvPr/>
-        </p:nvSpPr>
-        <p:spPr>
-          <a:xfrm>
-            <a:off x="11813352" y="760719"/>
-            <a:ext cx="116170" cy="116170"/>
-          </a:xfrm>
-          <a:prstGeom prst="ellipse">
-            <a:avLst/>
-          </a:prstGeom>
-          <a:solidFill>
-            <a:srgbClr val="3B8B91"/>
-          </a:solidFill>
-          <a:ln>
-            <a:noFill/>
-          </a:ln>
-        </p:spPr>
-        <p:txBody>
-          <a:bodyPr rtlCol="0" anchor="ctr"/>
-          <a:lstStyle/>
-          <a:p>
-            <a:pPr algn="ctr"/>
-          </a:p>
-        </p:txBody>
-      </p:sp>
-      <p:sp>
-        <p:nvSpPr>
-          <p:cNvPr id="13" name="장식"/>
-          <p:cNvSpPr/>
-          <p:nvPr/>
-        </p:nvSpPr>
-        <p:spPr>
-          <a:xfrm>
-            <a:off x="11573225" y="943562"/>
-            <a:ext cx="136804" cy="136804"/>
-          </a:xfrm>
-          <a:prstGeom prst="ellipse">
-            <a:avLst/>
-          </a:prstGeom>
-          <a:solidFill>
-            <a:srgbClr val="AE7429"/>
-          </a:solidFill>
-          <a:ln>
-            <a:noFill/>
-          </a:ln>
-        </p:spPr>
-        <p:txBody>
-          <a:bodyPr rtlCol="0" anchor="ctr"/>
-          <a:lstStyle/>
-          <a:p>
-            <a:pPr algn="ctr"/>
-          </a:p>
-        </p:txBody>
-      </p:sp>
-      <p:sp>
-        <p:nvSpPr>
-          <p:cNvPr id="14" name="장식"/>
-          <p:cNvSpPr/>
-          <p:nvPr/>
-        </p:nvSpPr>
-        <p:spPr>
-          <a:xfrm>
-            <a:off x="10863999" y="217553"/>
-            <a:ext cx="159934" cy="159934"/>
-          </a:xfrm>
-          <a:prstGeom prst="ellipse">
-            <a:avLst/>
-          </a:prstGeom>
-          <a:solidFill>
-            <a:srgbClr val="F5E3CC"/>
-          </a:solidFill>
-          <a:ln>
-            <a:noFill/>
-          </a:ln>
-        </p:spPr>
-        <p:txBody>
-          <a:bodyPr rtlCol="0" anchor="ctr"/>
-          <a:lstStyle/>
-          <a:p>
-            <a:pPr algn="ctr"/>
-          </a:p>
-        </p:txBody>
-      </p:sp>
-      <p:sp>
-        <p:nvSpPr>
           <p:cNvPr id="2" name="Title 1"/>
           <p:cNvSpPr>
             <a:spLocks noGrp="1"/>
@@ -7194,7 +5876,7 @@
       </p:sp>
       <p:graphicFrame>
         <p:nvGraphicFramePr>
-          <p:cNvPr id="15" name="표"/>
+          <p:cNvPr id="4" name="표"/>
           <p:cNvGraphicFramePr>
             <a:graphicFrameLocks noGrp="1"/>
           </p:cNvGraphicFramePr>
@@ -8951,325 +7633,6 @@
       </p:sp>
       <p:sp>
         <p:nvSpPr>
-          <p:cNvPr id="4" name="장식"/>
-          <p:cNvSpPr/>
-          <p:nvPr/>
-        </p:nvSpPr>
-        <p:spPr>
-          <a:xfrm>
-            <a:off x="10691076" y="489607"/>
-            <a:ext cx="195353" cy="195353"/>
-          </a:xfrm>
-          <a:prstGeom prst="ellipse">
-            <a:avLst/>
-          </a:prstGeom>
-          <a:solidFill>
-            <a:srgbClr val="AE7429"/>
-          </a:solidFill>
-          <a:ln>
-            <a:noFill/>
-          </a:ln>
-        </p:spPr>
-        <p:txBody>
-          <a:bodyPr rtlCol="0" anchor="ctr"/>
-          <a:lstStyle/>
-          <a:p>
-            <a:pPr algn="ctr"/>
-          </a:p>
-        </p:txBody>
-      </p:sp>
-      <p:sp>
-        <p:nvSpPr>
-          <p:cNvPr id="5" name="장식"/>
-          <p:cNvSpPr/>
-          <p:nvPr/>
-        </p:nvSpPr>
-        <p:spPr>
-          <a:xfrm>
-            <a:off x="11265390" y="555182"/>
-            <a:ext cx="118957" cy="118957"/>
-          </a:xfrm>
-          <a:prstGeom prst="ellipse">
-            <a:avLst/>
-          </a:prstGeom>
-          <a:solidFill>
-            <a:srgbClr val="F5E3CC"/>
-          </a:solidFill>
-          <a:ln>
-            <a:noFill/>
-          </a:ln>
-        </p:spPr>
-        <p:txBody>
-          <a:bodyPr rtlCol="0" anchor="ctr"/>
-          <a:lstStyle/>
-          <a:p>
-            <a:pPr algn="ctr"/>
-          </a:p>
-        </p:txBody>
-      </p:sp>
-      <p:sp>
-        <p:nvSpPr>
-          <p:cNvPr id="6" name="장식"/>
-          <p:cNvSpPr/>
-          <p:nvPr/>
-        </p:nvSpPr>
-        <p:spPr>
-          <a:xfrm>
-            <a:off x="11546210" y="1260630"/>
-            <a:ext cx="126058" cy="126058"/>
-          </a:xfrm>
-          <a:prstGeom prst="ellipse">
-            <a:avLst/>
-          </a:prstGeom>
-          <a:solidFill>
-            <a:srgbClr val="3B8B91"/>
-          </a:solidFill>
-          <a:ln>
-            <a:noFill/>
-          </a:ln>
-        </p:spPr>
-        <p:txBody>
-          <a:bodyPr rtlCol="0" anchor="ctr"/>
-          <a:lstStyle/>
-          <a:p>
-            <a:pPr algn="ctr"/>
-          </a:p>
-        </p:txBody>
-      </p:sp>
-      <p:sp>
-        <p:nvSpPr>
-          <p:cNvPr id="7" name="장식"/>
-          <p:cNvSpPr/>
-          <p:nvPr/>
-        </p:nvSpPr>
-        <p:spPr>
-          <a:xfrm>
-            <a:off x="11377933" y="601087"/>
-            <a:ext cx="93564" cy="93564"/>
-          </a:xfrm>
-          <a:prstGeom prst="ellipse">
-            <a:avLst/>
-          </a:prstGeom>
-          <a:solidFill>
-            <a:srgbClr val="AE7429"/>
-          </a:solidFill>
-          <a:ln>
-            <a:noFill/>
-          </a:ln>
-        </p:spPr>
-        <p:txBody>
-          <a:bodyPr rtlCol="0" anchor="ctr"/>
-          <a:lstStyle/>
-          <a:p>
-            <a:pPr algn="ctr"/>
-          </a:p>
-        </p:txBody>
-      </p:sp>
-      <p:sp>
-        <p:nvSpPr>
-          <p:cNvPr id="8" name="장식"/>
-          <p:cNvSpPr/>
-          <p:nvPr/>
-        </p:nvSpPr>
-        <p:spPr>
-          <a:xfrm>
-            <a:off x="10833017" y="314922"/>
-            <a:ext cx="102193" cy="102193"/>
-          </a:xfrm>
-          <a:prstGeom prst="ellipse">
-            <a:avLst/>
-          </a:prstGeom>
-          <a:solidFill>
-            <a:srgbClr val="F5E3CC"/>
-          </a:solidFill>
-          <a:ln>
-            <a:noFill/>
-          </a:ln>
-        </p:spPr>
-        <p:txBody>
-          <a:bodyPr rtlCol="0" anchor="ctr"/>
-          <a:lstStyle/>
-          <a:p>
-            <a:pPr algn="ctr"/>
-          </a:p>
-        </p:txBody>
-      </p:sp>
-      <p:sp>
-        <p:nvSpPr>
-          <p:cNvPr id="9" name="장식"/>
-          <p:cNvSpPr/>
-          <p:nvPr/>
-        </p:nvSpPr>
-        <p:spPr>
-          <a:xfrm>
-            <a:off x="11729729" y="1170282"/>
-            <a:ext cx="168803" cy="168803"/>
-          </a:xfrm>
-          <a:prstGeom prst="ellipse">
-            <a:avLst/>
-          </a:prstGeom>
-          <a:solidFill>
-            <a:srgbClr val="3B8B91"/>
-          </a:solidFill>
-          <a:ln>
-            <a:noFill/>
-          </a:ln>
-        </p:spPr>
-        <p:txBody>
-          <a:bodyPr rtlCol="0" anchor="ctr"/>
-          <a:lstStyle/>
-          <a:p>
-            <a:pPr algn="ctr"/>
-          </a:p>
-        </p:txBody>
-      </p:sp>
-      <p:sp>
-        <p:nvSpPr>
-          <p:cNvPr id="10" name="장식"/>
-          <p:cNvSpPr/>
-          <p:nvPr/>
-        </p:nvSpPr>
-        <p:spPr>
-          <a:xfrm>
-            <a:off x="11439796" y="376285"/>
-            <a:ext cx="196620" cy="196620"/>
-          </a:xfrm>
-          <a:prstGeom prst="ellipse">
-            <a:avLst/>
-          </a:prstGeom>
-          <a:solidFill>
-            <a:srgbClr val="AE7429"/>
-          </a:solidFill>
-          <a:ln>
-            <a:noFill/>
-          </a:ln>
-        </p:spPr>
-        <p:txBody>
-          <a:bodyPr rtlCol="0" anchor="ctr"/>
-          <a:lstStyle/>
-          <a:p>
-            <a:pPr algn="ctr"/>
-          </a:p>
-        </p:txBody>
-      </p:sp>
-      <p:sp>
-        <p:nvSpPr>
-          <p:cNvPr id="11" name="장식"/>
-          <p:cNvSpPr/>
-          <p:nvPr/>
-        </p:nvSpPr>
-        <p:spPr>
-          <a:xfrm>
-            <a:off x="11100531" y="396632"/>
-            <a:ext cx="154484" cy="154484"/>
-          </a:xfrm>
-          <a:prstGeom prst="ellipse">
-            <a:avLst/>
-          </a:prstGeom>
-          <a:solidFill>
-            <a:srgbClr val="F5E3CC"/>
-          </a:solidFill>
-          <a:ln>
-            <a:noFill/>
-          </a:ln>
-        </p:spPr>
-        <p:txBody>
-          <a:bodyPr rtlCol="0" anchor="ctr"/>
-          <a:lstStyle/>
-          <a:p>
-            <a:pPr algn="ctr"/>
-          </a:p>
-        </p:txBody>
-      </p:sp>
-      <p:sp>
-        <p:nvSpPr>
-          <p:cNvPr id="12" name="장식"/>
-          <p:cNvSpPr/>
-          <p:nvPr/>
-        </p:nvSpPr>
-        <p:spPr>
-          <a:xfrm>
-            <a:off x="11813352" y="760719"/>
-            <a:ext cx="116170" cy="116170"/>
-          </a:xfrm>
-          <a:prstGeom prst="ellipse">
-            <a:avLst/>
-          </a:prstGeom>
-          <a:solidFill>
-            <a:srgbClr val="3B8B91"/>
-          </a:solidFill>
-          <a:ln>
-            <a:noFill/>
-          </a:ln>
-        </p:spPr>
-        <p:txBody>
-          <a:bodyPr rtlCol="0" anchor="ctr"/>
-          <a:lstStyle/>
-          <a:p>
-            <a:pPr algn="ctr"/>
-          </a:p>
-        </p:txBody>
-      </p:sp>
-      <p:sp>
-        <p:nvSpPr>
-          <p:cNvPr id="13" name="장식"/>
-          <p:cNvSpPr/>
-          <p:nvPr/>
-        </p:nvSpPr>
-        <p:spPr>
-          <a:xfrm>
-            <a:off x="11573225" y="943562"/>
-            <a:ext cx="136804" cy="136804"/>
-          </a:xfrm>
-          <a:prstGeom prst="ellipse">
-            <a:avLst/>
-          </a:prstGeom>
-          <a:solidFill>
-            <a:srgbClr val="AE7429"/>
-          </a:solidFill>
-          <a:ln>
-            <a:noFill/>
-          </a:ln>
-        </p:spPr>
-        <p:txBody>
-          <a:bodyPr rtlCol="0" anchor="ctr"/>
-          <a:lstStyle/>
-          <a:p>
-            <a:pPr algn="ctr"/>
-          </a:p>
-        </p:txBody>
-      </p:sp>
-      <p:sp>
-        <p:nvSpPr>
-          <p:cNvPr id="14" name="장식"/>
-          <p:cNvSpPr/>
-          <p:nvPr/>
-        </p:nvSpPr>
-        <p:spPr>
-          <a:xfrm>
-            <a:off x="10863999" y="217553"/>
-            <a:ext cx="159934" cy="159934"/>
-          </a:xfrm>
-          <a:prstGeom prst="ellipse">
-            <a:avLst/>
-          </a:prstGeom>
-          <a:solidFill>
-            <a:srgbClr val="F5E3CC"/>
-          </a:solidFill>
-          <a:ln>
-            <a:noFill/>
-          </a:ln>
-        </p:spPr>
-        <p:txBody>
-          <a:bodyPr rtlCol="0" anchor="ctr"/>
-          <a:lstStyle/>
-          <a:p>
-            <a:pPr algn="ctr"/>
-          </a:p>
-        </p:txBody>
-      </p:sp>
-      <p:sp>
-        <p:nvSpPr>
           <p:cNvPr id="2" name="Title 1"/>
           <p:cNvSpPr>
             <a:spLocks noGrp="1"/>
@@ -9308,7 +7671,7 @@
       </p:sp>
       <p:sp>
         <p:nvSpPr>
-          <p:cNvPr id="15" name="카드 1"/>
+          <p:cNvPr id="4" name="카드 1"/>
           <p:cNvSpPr/>
           <p:nvPr/>
         </p:nvSpPr>
@@ -9341,7 +7704,7 @@
       </p:sp>
       <p:sp>
         <p:nvSpPr>
-          <p:cNvPr id="16" name="번호 1"/>
+          <p:cNvPr id="5" name="번호 1"/>
           <p:cNvSpPr/>
           <p:nvPr/>
         </p:nvSpPr>
@@ -9384,7 +7747,7 @@
       </p:sp>
       <p:sp>
         <p:nvSpPr>
-          <p:cNvPr id="17" name="TextBox 16"/>
+          <p:cNvPr id="6" name="TextBox 5"/>
           <p:cNvSpPr txBox="1"/>
           <p:nvPr/>
         </p:nvSpPr>
@@ -9422,7 +7785,7 @@
       </p:sp>
       <p:sp>
         <p:nvSpPr>
-          <p:cNvPr id="18" name="TextBox 17"/>
+          <p:cNvPr id="7" name="TextBox 6"/>
           <p:cNvSpPr txBox="1"/>
           <p:nvPr/>
         </p:nvSpPr>
@@ -9460,7 +7823,7 @@
       </p:sp>
       <p:sp>
         <p:nvSpPr>
-          <p:cNvPr id="19" name="카드 2"/>
+          <p:cNvPr id="8" name="카드 2"/>
           <p:cNvSpPr/>
           <p:nvPr/>
         </p:nvSpPr>
@@ -9493,7 +7856,7 @@
       </p:sp>
       <p:sp>
         <p:nvSpPr>
-          <p:cNvPr id="20" name="번호 2"/>
+          <p:cNvPr id="9" name="번호 2"/>
           <p:cNvSpPr/>
           <p:nvPr/>
         </p:nvSpPr>
@@ -9536,7 +7899,7 @@
       </p:sp>
       <p:sp>
         <p:nvSpPr>
-          <p:cNvPr id="21" name="TextBox 20"/>
+          <p:cNvPr id="10" name="TextBox 9"/>
           <p:cNvSpPr txBox="1"/>
           <p:nvPr/>
         </p:nvSpPr>
@@ -9574,7 +7937,7 @@
       </p:sp>
       <p:sp>
         <p:nvSpPr>
-          <p:cNvPr id="22" name="TextBox 21"/>
+          <p:cNvPr id="11" name="TextBox 10"/>
           <p:cNvSpPr txBox="1"/>
           <p:nvPr/>
         </p:nvSpPr>
@@ -9612,7 +7975,7 @@
       </p:sp>
       <p:sp>
         <p:nvSpPr>
-          <p:cNvPr id="23" name="카드 3"/>
+          <p:cNvPr id="12" name="카드 3"/>
           <p:cNvSpPr/>
           <p:nvPr/>
         </p:nvSpPr>
@@ -9645,7 +8008,7 @@
       </p:sp>
       <p:sp>
         <p:nvSpPr>
-          <p:cNvPr id="24" name="번호 3"/>
+          <p:cNvPr id="13" name="번호 3"/>
           <p:cNvSpPr/>
           <p:nvPr/>
         </p:nvSpPr>
@@ -9688,7 +8051,7 @@
       </p:sp>
       <p:sp>
         <p:nvSpPr>
-          <p:cNvPr id="25" name="TextBox 24"/>
+          <p:cNvPr id="14" name="TextBox 13"/>
           <p:cNvSpPr txBox="1"/>
           <p:nvPr/>
         </p:nvSpPr>
@@ -9726,7 +8089,7 @@
       </p:sp>
       <p:sp>
         <p:nvSpPr>
-          <p:cNvPr id="26" name="TextBox 25"/>
+          <p:cNvPr id="15" name="TextBox 14"/>
           <p:cNvSpPr txBox="1"/>
           <p:nvPr/>
         </p:nvSpPr>
@@ -9764,7 +8127,7 @@
       </p:sp>
       <p:sp>
         <p:nvSpPr>
-          <p:cNvPr id="27" name="안내"/>
+          <p:cNvPr id="16" name="안내"/>
           <p:cNvSpPr txBox="1"/>
           <p:nvPr/>
         </p:nvSpPr>
@@ -9857,325 +8220,6 @@
       </p:sp>
       <p:sp>
         <p:nvSpPr>
-          <p:cNvPr id="4" name="장식"/>
-          <p:cNvSpPr/>
-          <p:nvPr/>
-        </p:nvSpPr>
-        <p:spPr>
-          <a:xfrm>
-            <a:off x="10691076" y="489607"/>
-            <a:ext cx="195353" cy="195353"/>
-          </a:xfrm>
-          <a:prstGeom prst="ellipse">
-            <a:avLst/>
-          </a:prstGeom>
-          <a:solidFill>
-            <a:srgbClr val="AE7429"/>
-          </a:solidFill>
-          <a:ln>
-            <a:noFill/>
-          </a:ln>
-        </p:spPr>
-        <p:txBody>
-          <a:bodyPr rtlCol="0" anchor="ctr"/>
-          <a:lstStyle/>
-          <a:p>
-            <a:pPr algn="ctr"/>
-          </a:p>
-        </p:txBody>
-      </p:sp>
-      <p:sp>
-        <p:nvSpPr>
-          <p:cNvPr id="5" name="장식"/>
-          <p:cNvSpPr/>
-          <p:nvPr/>
-        </p:nvSpPr>
-        <p:spPr>
-          <a:xfrm>
-            <a:off x="11265390" y="555182"/>
-            <a:ext cx="118957" cy="118957"/>
-          </a:xfrm>
-          <a:prstGeom prst="ellipse">
-            <a:avLst/>
-          </a:prstGeom>
-          <a:solidFill>
-            <a:srgbClr val="F5E3CC"/>
-          </a:solidFill>
-          <a:ln>
-            <a:noFill/>
-          </a:ln>
-        </p:spPr>
-        <p:txBody>
-          <a:bodyPr rtlCol="0" anchor="ctr"/>
-          <a:lstStyle/>
-          <a:p>
-            <a:pPr algn="ctr"/>
-          </a:p>
-        </p:txBody>
-      </p:sp>
-      <p:sp>
-        <p:nvSpPr>
-          <p:cNvPr id="6" name="장식"/>
-          <p:cNvSpPr/>
-          <p:nvPr/>
-        </p:nvSpPr>
-        <p:spPr>
-          <a:xfrm>
-            <a:off x="11546210" y="1260630"/>
-            <a:ext cx="126058" cy="126058"/>
-          </a:xfrm>
-          <a:prstGeom prst="ellipse">
-            <a:avLst/>
-          </a:prstGeom>
-          <a:solidFill>
-            <a:srgbClr val="3B8B91"/>
-          </a:solidFill>
-          <a:ln>
-            <a:noFill/>
-          </a:ln>
-        </p:spPr>
-        <p:txBody>
-          <a:bodyPr rtlCol="0" anchor="ctr"/>
-          <a:lstStyle/>
-          <a:p>
-            <a:pPr algn="ctr"/>
-          </a:p>
-        </p:txBody>
-      </p:sp>
-      <p:sp>
-        <p:nvSpPr>
-          <p:cNvPr id="7" name="장식"/>
-          <p:cNvSpPr/>
-          <p:nvPr/>
-        </p:nvSpPr>
-        <p:spPr>
-          <a:xfrm>
-            <a:off x="11377933" y="601087"/>
-            <a:ext cx="93564" cy="93564"/>
-          </a:xfrm>
-          <a:prstGeom prst="ellipse">
-            <a:avLst/>
-          </a:prstGeom>
-          <a:solidFill>
-            <a:srgbClr val="AE7429"/>
-          </a:solidFill>
-          <a:ln>
-            <a:noFill/>
-          </a:ln>
-        </p:spPr>
-        <p:txBody>
-          <a:bodyPr rtlCol="0" anchor="ctr"/>
-          <a:lstStyle/>
-          <a:p>
-            <a:pPr algn="ctr"/>
-          </a:p>
-        </p:txBody>
-      </p:sp>
-      <p:sp>
-        <p:nvSpPr>
-          <p:cNvPr id="8" name="장식"/>
-          <p:cNvSpPr/>
-          <p:nvPr/>
-        </p:nvSpPr>
-        <p:spPr>
-          <a:xfrm>
-            <a:off x="10833017" y="314922"/>
-            <a:ext cx="102193" cy="102193"/>
-          </a:xfrm>
-          <a:prstGeom prst="ellipse">
-            <a:avLst/>
-          </a:prstGeom>
-          <a:solidFill>
-            <a:srgbClr val="F5E3CC"/>
-          </a:solidFill>
-          <a:ln>
-            <a:noFill/>
-          </a:ln>
-        </p:spPr>
-        <p:txBody>
-          <a:bodyPr rtlCol="0" anchor="ctr"/>
-          <a:lstStyle/>
-          <a:p>
-            <a:pPr algn="ctr"/>
-          </a:p>
-        </p:txBody>
-      </p:sp>
-      <p:sp>
-        <p:nvSpPr>
-          <p:cNvPr id="9" name="장식"/>
-          <p:cNvSpPr/>
-          <p:nvPr/>
-        </p:nvSpPr>
-        <p:spPr>
-          <a:xfrm>
-            <a:off x="11729729" y="1170282"/>
-            <a:ext cx="168803" cy="168803"/>
-          </a:xfrm>
-          <a:prstGeom prst="ellipse">
-            <a:avLst/>
-          </a:prstGeom>
-          <a:solidFill>
-            <a:srgbClr val="3B8B91"/>
-          </a:solidFill>
-          <a:ln>
-            <a:noFill/>
-          </a:ln>
-        </p:spPr>
-        <p:txBody>
-          <a:bodyPr rtlCol="0" anchor="ctr"/>
-          <a:lstStyle/>
-          <a:p>
-            <a:pPr algn="ctr"/>
-          </a:p>
-        </p:txBody>
-      </p:sp>
-      <p:sp>
-        <p:nvSpPr>
-          <p:cNvPr id="10" name="장식"/>
-          <p:cNvSpPr/>
-          <p:nvPr/>
-        </p:nvSpPr>
-        <p:spPr>
-          <a:xfrm>
-            <a:off x="11439796" y="376285"/>
-            <a:ext cx="196620" cy="196620"/>
-          </a:xfrm>
-          <a:prstGeom prst="ellipse">
-            <a:avLst/>
-          </a:prstGeom>
-          <a:solidFill>
-            <a:srgbClr val="AE7429"/>
-          </a:solidFill>
-          <a:ln>
-            <a:noFill/>
-          </a:ln>
-        </p:spPr>
-        <p:txBody>
-          <a:bodyPr rtlCol="0" anchor="ctr"/>
-          <a:lstStyle/>
-          <a:p>
-            <a:pPr algn="ctr"/>
-          </a:p>
-        </p:txBody>
-      </p:sp>
-      <p:sp>
-        <p:nvSpPr>
-          <p:cNvPr id="11" name="장식"/>
-          <p:cNvSpPr/>
-          <p:nvPr/>
-        </p:nvSpPr>
-        <p:spPr>
-          <a:xfrm>
-            <a:off x="11100531" y="396632"/>
-            <a:ext cx="154484" cy="154484"/>
-          </a:xfrm>
-          <a:prstGeom prst="ellipse">
-            <a:avLst/>
-          </a:prstGeom>
-          <a:solidFill>
-            <a:srgbClr val="F5E3CC"/>
-          </a:solidFill>
-          <a:ln>
-            <a:noFill/>
-          </a:ln>
-        </p:spPr>
-        <p:txBody>
-          <a:bodyPr rtlCol="0" anchor="ctr"/>
-          <a:lstStyle/>
-          <a:p>
-            <a:pPr algn="ctr"/>
-          </a:p>
-        </p:txBody>
-      </p:sp>
-      <p:sp>
-        <p:nvSpPr>
-          <p:cNvPr id="12" name="장식"/>
-          <p:cNvSpPr/>
-          <p:nvPr/>
-        </p:nvSpPr>
-        <p:spPr>
-          <a:xfrm>
-            <a:off x="11813352" y="760719"/>
-            <a:ext cx="116170" cy="116170"/>
-          </a:xfrm>
-          <a:prstGeom prst="ellipse">
-            <a:avLst/>
-          </a:prstGeom>
-          <a:solidFill>
-            <a:srgbClr val="3B8B91"/>
-          </a:solidFill>
-          <a:ln>
-            <a:noFill/>
-          </a:ln>
-        </p:spPr>
-        <p:txBody>
-          <a:bodyPr rtlCol="0" anchor="ctr"/>
-          <a:lstStyle/>
-          <a:p>
-            <a:pPr algn="ctr"/>
-          </a:p>
-        </p:txBody>
-      </p:sp>
-      <p:sp>
-        <p:nvSpPr>
-          <p:cNvPr id="13" name="장식"/>
-          <p:cNvSpPr/>
-          <p:nvPr/>
-        </p:nvSpPr>
-        <p:spPr>
-          <a:xfrm>
-            <a:off x="11573225" y="943562"/>
-            <a:ext cx="136804" cy="136804"/>
-          </a:xfrm>
-          <a:prstGeom prst="ellipse">
-            <a:avLst/>
-          </a:prstGeom>
-          <a:solidFill>
-            <a:srgbClr val="AE7429"/>
-          </a:solidFill>
-          <a:ln>
-            <a:noFill/>
-          </a:ln>
-        </p:spPr>
-        <p:txBody>
-          <a:bodyPr rtlCol="0" anchor="ctr"/>
-          <a:lstStyle/>
-          <a:p>
-            <a:pPr algn="ctr"/>
-          </a:p>
-        </p:txBody>
-      </p:sp>
-      <p:sp>
-        <p:nvSpPr>
-          <p:cNvPr id="14" name="장식"/>
-          <p:cNvSpPr/>
-          <p:nvPr/>
-        </p:nvSpPr>
-        <p:spPr>
-          <a:xfrm>
-            <a:off x="10863999" y="217553"/>
-            <a:ext cx="159934" cy="159934"/>
-          </a:xfrm>
-          <a:prstGeom prst="ellipse">
-            <a:avLst/>
-          </a:prstGeom>
-          <a:solidFill>
-            <a:srgbClr val="F5E3CC"/>
-          </a:solidFill>
-          <a:ln>
-            <a:noFill/>
-          </a:ln>
-        </p:spPr>
-        <p:txBody>
-          <a:bodyPr rtlCol="0" anchor="ctr"/>
-          <a:lstStyle/>
-          <a:p>
-            <a:pPr algn="ctr"/>
-          </a:p>
-        </p:txBody>
-      </p:sp>
-      <p:sp>
-        <p:nvSpPr>
           <p:cNvPr id="2" name="Title 1"/>
           <p:cNvSpPr>
             <a:spLocks noGrp="1"/>
@@ -10214,7 +8258,7 @@
       </p:sp>
       <p:sp>
         <p:nvSpPr>
-          <p:cNvPr id="15" name="카드 1"/>
+          <p:cNvPr id="4" name="카드 1"/>
           <p:cNvSpPr/>
           <p:nvPr/>
         </p:nvSpPr>
@@ -10247,7 +8291,7 @@
       </p:sp>
       <p:sp>
         <p:nvSpPr>
-          <p:cNvPr id="16" name="번호 1"/>
+          <p:cNvPr id="5" name="번호 1"/>
           <p:cNvSpPr/>
           <p:nvPr/>
         </p:nvSpPr>
@@ -10290,7 +8334,7 @@
       </p:sp>
       <p:sp>
         <p:nvSpPr>
-          <p:cNvPr id="17" name="TextBox 16"/>
+          <p:cNvPr id="6" name="TextBox 5"/>
           <p:cNvSpPr txBox="1"/>
           <p:nvPr/>
         </p:nvSpPr>
@@ -10328,7 +8372,7 @@
       </p:sp>
       <p:sp>
         <p:nvSpPr>
-          <p:cNvPr id="18" name="TextBox 17"/>
+          <p:cNvPr id="7" name="TextBox 6"/>
           <p:cNvSpPr txBox="1"/>
           <p:nvPr/>
         </p:nvSpPr>
@@ -10366,7 +8410,7 @@
       </p:sp>
       <p:sp>
         <p:nvSpPr>
-          <p:cNvPr id="19" name="카드 2"/>
+          <p:cNvPr id="8" name="카드 2"/>
           <p:cNvSpPr/>
           <p:nvPr/>
         </p:nvSpPr>
@@ -10399,7 +8443,7 @@
       </p:sp>
       <p:sp>
         <p:nvSpPr>
-          <p:cNvPr id="20" name="번호 2"/>
+          <p:cNvPr id="9" name="번호 2"/>
           <p:cNvSpPr/>
           <p:nvPr/>
         </p:nvSpPr>
@@ -10442,7 +8486,7 @@
       </p:sp>
       <p:sp>
         <p:nvSpPr>
-          <p:cNvPr id="21" name="TextBox 20"/>
+          <p:cNvPr id="10" name="TextBox 9"/>
           <p:cNvSpPr txBox="1"/>
           <p:nvPr/>
         </p:nvSpPr>
@@ -10480,7 +8524,7 @@
       </p:sp>
       <p:sp>
         <p:nvSpPr>
-          <p:cNvPr id="22" name="TextBox 21"/>
+          <p:cNvPr id="11" name="TextBox 10"/>
           <p:cNvSpPr txBox="1"/>
           <p:nvPr/>
         </p:nvSpPr>
@@ -10518,7 +8562,7 @@
       </p:sp>
       <p:sp>
         <p:nvSpPr>
-          <p:cNvPr id="23" name="카드 3"/>
+          <p:cNvPr id="12" name="카드 3"/>
           <p:cNvSpPr/>
           <p:nvPr/>
         </p:nvSpPr>
@@ -10551,7 +8595,7 @@
       </p:sp>
       <p:sp>
         <p:nvSpPr>
-          <p:cNvPr id="24" name="번호 3"/>
+          <p:cNvPr id="13" name="번호 3"/>
           <p:cNvSpPr/>
           <p:nvPr/>
         </p:nvSpPr>
@@ -10594,7 +8638,7 @@
       </p:sp>
       <p:sp>
         <p:nvSpPr>
-          <p:cNvPr id="25" name="TextBox 24"/>
+          <p:cNvPr id="14" name="TextBox 13"/>
           <p:cNvSpPr txBox="1"/>
           <p:nvPr/>
         </p:nvSpPr>
@@ -10632,7 +8676,7 @@
       </p:sp>
       <p:sp>
         <p:nvSpPr>
-          <p:cNvPr id="26" name="TextBox 25"/>
+          <p:cNvPr id="15" name="TextBox 14"/>
           <p:cNvSpPr txBox="1"/>
           <p:nvPr/>
         </p:nvSpPr>
@@ -10670,7 +8714,7 @@
       </p:sp>
       <p:sp>
         <p:nvSpPr>
-          <p:cNvPr id="27" name="안내 문구"/>
+          <p:cNvPr id="16" name="안내 문구"/>
           <p:cNvSpPr txBox="1"/>
           <p:nvPr/>
         </p:nvSpPr>
